--- a/examples/relatorio-de-progresso.pptx
+++ b/examples/relatorio-de-progresso.pptx
@@ -6140,7 +6140,7 @@
       </p:sp>
       <p:graphicFrame>
         <p:nvGraphicFramePr>
-          <p:cNvPr id="9" name="Chart 8"/>
+          <p:cNvPr id="9" name="Chart 8" descr="58% das reprovações vêm de processo ou calibração"/>
           <p:cNvGraphicFramePr>
             <a:graphicFrameLocks noGrp="1"/>
           </p:cNvGraphicFramePr>
